--- a/presentation/Module-4_From-Clarified-Spec-to-Reviewable-Plan.pptx
+++ b/presentation/Module-4_From-Clarified-Spec-to-Reviewable-Plan.pptx
@@ -16,10 +16,9 @@
     <p:sldId id="264" r:id="rId10"/>
     <p:sldId id="265" r:id="rId11"/>
     <p:sldId id="266" r:id="rId12"/>
-    <p:sldId id="267" r:id="rId13"/>
   </p:sldIdLst>
   <p:notesMasterIdLst>
-    <p:notesMasterId r:id="rId14"/>
+    <p:notesMasterId r:id="rId13"/>
   </p:notesMasterIdLst>
   <p:sldSz cx="12192000" cy="6858000"/>
   <p:notesSz cx="6858000" cy="12192000"/>
@@ -713,94 +712,6 @@
             <a:fld id="{F7021451-1387-4CA6-816F-3879F97B5CBC}" type="slidenum">
               <a:rPr lang="en-US"/>
               <a:t>11</a:t>
-            </a:fld>
-            <a:endParaRPr lang="en-US"/>
-          </a:p>
-        </p:txBody>
-      </p:sp>
-    </p:spTree>
-    <p:extLst>
-      <p:ext uri="{BB962C8B-B14F-4D97-AF65-F5344CB8AC3E}">
-        <p14:creationId xmlns:p14="http://schemas.microsoft.com/office/powerpoint/2010/main" val="1024086991"/>
-      </p:ext>
-    </p:extLst>
-  </p:cSld>
-  <p:clrMapOvr>
-    <a:masterClrMapping/>
-  </p:clrMapOvr>
-</p:notes>
-</file>
-
-<file path=ppt/notesSlides/notesSlide12.xml><?xml version="1.0" encoding="utf-8"?>
-<p:notes xmlns:a="http://schemas.openxmlformats.org/drawingml/2006/main" xmlns:r="http://schemas.openxmlformats.org/officeDocument/2006/relationships" xmlns:p="http://schemas.openxmlformats.org/presentationml/2006/main">
-  <p:cSld>
-    <p:spTree>
-      <p:nvGrpSpPr>
-        <p:cNvPr id="1" name=""/>
-        <p:cNvGrpSpPr/>
-        <p:nvPr/>
-      </p:nvGrpSpPr>
-      <p:grpSpPr>
-        <a:xfrm>
-          <a:off x="0" y="0"/>
-          <a:ext cx="0" cy="0"/>
-          <a:chOff x="0" y="0"/>
-          <a:chExt cx="0" cy="0"/>
-        </a:xfrm>
-      </p:grpSpPr>
-      <p:sp>
-        <p:nvSpPr>
-          <p:cNvPr id="2" name="Slide Image Placeholder 1"/>
-          <p:cNvSpPr>
-            <a:spLocks noGrp="1" noRot="1" noChangeAspect="1"/>
-          </p:cNvSpPr>
-          <p:nvPr>
-            <p:ph type="sldImg"/>
-          </p:nvPr>
-        </p:nvSpPr>
-        <p:spPr/>
-      </p:sp>
-      <p:sp>
-        <p:nvSpPr>
-          <p:cNvPr id="3" name="Notes Placeholder 2"/>
-          <p:cNvSpPr>
-            <a:spLocks noGrp="1"/>
-          </p:cNvSpPr>
-          <p:nvPr>
-            <p:ph type="body" idx="1"/>
-          </p:nvPr>
-        </p:nvSpPr>
-        <p:spPr/>
-        <p:txBody>
-          <a:bodyPr/>
-          <a:lstStyle/>
-          <a:p>
-            <a:r>
-              <a:rPr lang="en-US" dirty="0"/>
-              <a:t/>
-            </a:r>
-            <a:endParaRPr lang="en-US" dirty="0"/>
-          </a:p>
-        </p:txBody>
-      </p:sp>
-      <p:sp>
-        <p:nvSpPr>
-          <p:cNvPr id="4" name="Slide Number Placeholder 3"/>
-          <p:cNvSpPr>
-            <a:spLocks noGrp="1"/>
-          </p:cNvSpPr>
-          <p:nvPr>
-            <p:ph type="sldNum" sz="quarter" idx="10"/>
-          </p:nvPr>
-        </p:nvSpPr>
-        <p:spPr/>
-        <p:txBody>
-          <a:bodyPr/>
-          <a:lstStyle/>
-          <a:p>
-            <a:fld id="{F7021451-1387-4CA6-816F-3879F97B5CBC}" type="slidenum">
-              <a:rPr lang="en-US"/>
-              <a:t>12</a:t>
             </a:fld>
             <a:endParaRPr lang="en-US"/>
           </a:p>
@@ -3384,260 +3295,6 @@
 </p:sld>
 </file>
 
-<file path=ppt/slides/slide12.xml><?xml version="1.0" encoding="utf-8"?>
-<p:sld xmlns:a="http://schemas.openxmlformats.org/drawingml/2006/main" xmlns:r="http://schemas.openxmlformats.org/officeDocument/2006/relationships" xmlns:p="http://schemas.openxmlformats.org/presentationml/2006/main">
-  <p:cSld name="Slide 12">
-    <p:bg>
-      <p:bgPr>
-        <a:solidFill>
-          <a:srgbClr val="FFFFFF"/>
-        </a:solidFill>
-      </p:bgPr>
-    </p:bg>
-    <p:spTree>
-      <p:nvGrpSpPr>
-        <p:cNvPr id="1" name=""/>
-        <p:cNvGrpSpPr/>
-        <p:nvPr/>
-      </p:nvGrpSpPr>
-      <p:grpSpPr>
-        <a:xfrm>
-          <a:off x="0" y="0"/>
-          <a:ext cx="0" cy="0"/>
-          <a:chOff x="0" y="0"/>
-          <a:chExt cx="0" cy="0"/>
-        </a:xfrm>
-      </p:grpSpPr>
-      <p:sp>
-        <p:nvSpPr>
-          <p:cNvPr id="2" name="Shape 0"/>
-          <p:cNvSpPr/>
-          <p:nvPr/>
-        </p:nvSpPr>
-        <p:spPr>
-          <a:xfrm>
-            <a:off x="548640" y="1828800"/>
-            <a:ext cx="11094415" cy="2377440"/>
-          </a:xfrm>
-          <a:prstGeom prst="roundRect">
-            <a:avLst>
-              <a:gd name="adj" fmla="val 4615"/>
-            </a:avLst>
-          </a:prstGeom>
-          <a:solidFill>
-            <a:srgbClr val="F2F5F9"/>
-          </a:solidFill>
-          <a:ln w="15875">
-            <a:solidFill>
-              <a:srgbClr val="C0504D"/>
-            </a:solidFill>
-            <a:prstDash val="solid"/>
-          </a:ln>
-        </p:spPr>
-      </p:sp>
-      <p:sp>
-        <p:nvSpPr>
-          <p:cNvPr id="3" name="Text 1"/>
-          <p:cNvSpPr/>
-          <p:nvPr/>
-        </p:nvSpPr>
-        <p:spPr>
-          <a:xfrm>
-            <a:off x="1005840" y="2103120"/>
-            <a:ext cx="10180015" cy="365760"/>
-          </a:xfrm>
-          <a:prstGeom prst="rect">
-            <a:avLst/>
-          </a:prstGeom>
-          <a:noFill/>
-          <a:ln/>
-        </p:spPr>
-        <p:txBody>
-          <a:bodyPr wrap="square" rtlCol="0" anchor="ctr"/>
-          <a:lstStyle/>
-          <a:p>
-            <a:pPr indent="0" marL="0">
-              <a:buNone/>
-            </a:pPr>
-            <a:r>
-              <a:rPr lang="en-US" sz="1300" b="1" spc="150" kern="0" dirty="0">
-                <a:solidFill>
-                  <a:srgbClr val="C0504D"/>
-                </a:solidFill>
-                <a:latin typeface="Calibri" pitchFamily="34" charset="0"/>
-                <a:ea typeface="Calibri" pitchFamily="34" charset="-122"/>
-                <a:cs typeface="Calibri" pitchFamily="34" charset="-120"/>
-              </a:rPr>
-              <a:t>HANDS-ON NEXT</a:t>
-            </a:r>
-            <a:endParaRPr lang="en-US" sz="1300" dirty="0"/>
-          </a:p>
-        </p:txBody>
-      </p:sp>
-      <p:sp>
-        <p:nvSpPr>
-          <p:cNvPr id="4" name="Text 2"/>
-          <p:cNvSpPr/>
-          <p:nvPr/>
-        </p:nvSpPr>
-        <p:spPr>
-          <a:xfrm>
-            <a:off x="1005840" y="2514600"/>
-            <a:ext cx="10180015" cy="1463040"/>
-          </a:xfrm>
-          <a:prstGeom prst="rect">
-            <a:avLst/>
-          </a:prstGeom>
-          <a:noFill/>
-          <a:ln/>
-        </p:spPr>
-        <p:txBody>
-          <a:bodyPr wrap="square" rtlCol="0" anchor="t"/>
-          <a:lstStyle/>
-          <a:p>
-            <a:pPr indent="0" marL="0">
-              <a:buNone/>
-            </a:pPr>
-            <a:r>
-              <a:rPr lang="en-US" sz="1700" dirty="0">
-                <a:solidFill>
-                  <a:srgbClr val="1B2A4A"/>
-                </a:solidFill>
-                <a:latin typeface="Calibri" pitchFamily="34" charset="0"/>
-                <a:ea typeface="Calibri" pitchFamily="34" charset="-122"/>
-                <a:cs typeface="Calibri" pitchFamily="34" charset="-120"/>
-              </a:rPr>
-              <a:t>Generate a plan from your project's spec and review it line by line as a team. Edit at least one decision you disagree with, then decompose the approved plan into tasks and confirm each one maps back to a specific requirement.</a:t>
-            </a:r>
-            <a:endParaRPr lang="en-US" sz="1700" dirty="0"/>
-          </a:p>
-        </p:txBody>
-      </p:sp>
-      <p:sp>
-        <p:nvSpPr>
-          <p:cNvPr id="5" name="Text 3"/>
-          <p:cNvSpPr/>
-          <p:nvPr/>
-        </p:nvSpPr>
-        <p:spPr>
-          <a:xfrm>
-            <a:off x="548640" y="4480560"/>
-            <a:ext cx="11094415" cy="457200"/>
-          </a:xfrm>
-          <a:prstGeom prst="rect">
-            <a:avLst/>
-          </a:prstGeom>
-          <a:noFill/>
-          <a:ln/>
-        </p:spPr>
-        <p:txBody>
-          <a:bodyPr wrap="square" rtlCol="0" anchor="ctr"/>
-          <a:lstStyle/>
-          <a:p>
-            <a:pPr algn="ctr" indent="0" marL="0">
-              <a:buNone/>
-            </a:pPr>
-            <a:r>
-              <a:rPr lang="en-US" sz="1300" i="1" dirty="0">
-                <a:solidFill>
-                  <a:srgbClr val="5A6B85"/>
-                </a:solidFill>
-                <a:latin typeface="Calibri" pitchFamily="34" charset="0"/>
-                <a:ea typeface="Calibri" pitchFamily="34" charset="-122"/>
-                <a:cs typeface="Calibri" pitchFamily="34" charset="-120"/>
-              </a:rPr>
-              <a:t>Next: Module 5: Quality Gates Before Implementation</a:t>
-            </a:r>
-            <a:endParaRPr lang="en-US" sz="1300" dirty="0"/>
-          </a:p>
-        </p:txBody>
-      </p:sp>
-      <p:sp>
-        <p:nvSpPr>
-          <p:cNvPr id="6" name="Text 4"/>
-          <p:cNvSpPr/>
-          <p:nvPr/>
-        </p:nvSpPr>
-        <p:spPr>
-          <a:xfrm>
-            <a:off x="548640" y="6473952"/>
-            <a:ext cx="5486400" cy="274320"/>
-          </a:xfrm>
-          <a:prstGeom prst="rect">
-            <a:avLst/>
-          </a:prstGeom>
-          <a:noFill/>
-          <a:ln/>
-        </p:spPr>
-        <p:txBody>
-          <a:bodyPr wrap="square" rtlCol="0" anchor="ctr"/>
-          <a:lstStyle/>
-          <a:p>
-            <a:pPr algn="l" indent="0" marL="0">
-              <a:buNone/>
-            </a:pPr>
-            <a:r>
-              <a:rPr lang="en-US" sz="1000" dirty="0">
-                <a:solidFill>
-                  <a:srgbClr val="5A6B85"/>
-                </a:solidFill>
-                <a:latin typeface="Calibri" pitchFamily="34" charset="0"/>
-                <a:ea typeface="Calibri" pitchFamily="34" charset="-122"/>
-                <a:cs typeface="Calibri" pitchFamily="34" charset="-120"/>
-              </a:rPr>
-              <a:t>Module 4</a:t>
-            </a:r>
-            <a:endParaRPr lang="en-US" sz="1000" dirty="0"/>
-          </a:p>
-        </p:txBody>
-      </p:sp>
-      <p:sp>
-        <p:nvSpPr>
-          <p:cNvPr id="7" name="Text 5"/>
-          <p:cNvSpPr/>
-          <p:nvPr/>
-        </p:nvSpPr>
-        <p:spPr>
-          <a:xfrm>
-            <a:off x="6156655" y="6473952"/>
-            <a:ext cx="5486400" cy="274320"/>
-          </a:xfrm>
-          <a:prstGeom prst="rect">
-            <a:avLst/>
-          </a:prstGeom>
-          <a:noFill/>
-          <a:ln/>
-        </p:spPr>
-        <p:txBody>
-          <a:bodyPr wrap="square" rtlCol="0" anchor="ctr"/>
-          <a:lstStyle/>
-          <a:p>
-            <a:pPr algn="r" indent="0" marL="0">
-              <a:buNone/>
-            </a:pPr>
-            <a:r>
-              <a:rPr lang="en-US" sz="1000" dirty="0">
-                <a:solidFill>
-                  <a:srgbClr val="5A6B85"/>
-                </a:solidFill>
-                <a:latin typeface="Calibri" pitchFamily="34" charset="0"/>
-                <a:ea typeface="Calibri" pitchFamily="34" charset="-122"/>
-                <a:cs typeface="Calibri" pitchFamily="34" charset="-120"/>
-              </a:rPr>
-              <a:t>Spec-Driven Development with Agentic AI</a:t>
-            </a:r>
-            <a:endParaRPr lang="en-US" sz="1000" dirty="0"/>
-          </a:p>
-        </p:txBody>
-      </p:sp>
-    </p:spTree>
-  </p:cSld>
-  <p:clrMapOvr>
-    <a:masterClrMapping/>
-  </p:clrMapOvr>
-</p:sld>
-</file>
-
 <file path=ppt/slides/slide2.xml><?xml version="1.0" encoding="utf-8"?>
 <p:sld xmlns:a="http://schemas.openxmlformats.org/drawingml/2006/main" xmlns:r="http://schemas.openxmlformats.org/officeDocument/2006/relationships" xmlns:p="http://schemas.openxmlformats.org/presentationml/2006/main">
   <p:cSld name="Slide 2">

--- a/presentation/Module-4_From-Clarified-Spec-to-Reviewable-Plan.pptx
+++ b/presentation/Module-4_From-Clarified-Spec-to-Reviewable-Plan.pptx
@@ -1456,6 +1456,54 @@
           <a:chExt cx="0" cy="0"/>
         </a:xfrm>
       </p:grpSpPr>
+      <p:sp>
+        <p:nvSpPr>
+          <p:cNvPr id="25" name="Slide Number Placeholder 0"/>
+          <p:cNvSpPr>
+            <a:spLocks noGrp="1"/>
+          </p:cNvSpPr>
+          <p:nvPr>
+            <p:ph type="sldNum" sz="quarter" idx="4294967295"/>
+          </p:nvPr>
+        </p:nvSpPr>
+        <p:spPr>
+          <a:xfrm>
+            <a:off x="5821528" y="6473952"/>
+            <a:ext cx="548640" cy="274320"/>
+          </a:xfrm>
+          <a:prstGeom prst="rect">
+            <a:avLst/>
+          </a:prstGeom>
+          <a:extLst>
+            <a:ext uri="{C572A759-6A51-4108-AA02-DFA0A04FC94B}">
+              <ma14:wrappingTextBoxFlag xmlns:ma14="http://schemas.microsoft.com/office/mac/drawingml/2011/main" val="0"/>
+            </a:ext>
+          </a:extLst>
+        </p:spPr>
+        <p:txBody>
+          <a:bodyPr anchor="ctr"/>
+          <a:lstStyle>
+            <a:lvl1pPr>
+              <a:defRPr sz="1000">
+                <a:solidFill>
+                  <a:srgbClr val="8CA3C7"/>
+                </a:solidFill>
+                <a:latin typeface="Calibri"/>
+                <a:ea typeface="Calibri"/>
+                <a:cs typeface="Calibri"/>
+              </a:defRPr>
+            </a:lvl1pPr>
+          </a:lstStyle>
+          <a:p>
+            <a:pPr algn="ctr"/>
+            <a:fld id="{F7021451-1387-4CA6-816F-3879F97B5CBC}" type="slidenum">
+              <a:rPr b="0" lang="en-US"/>
+              <a:t>1000</a:t>
+            </a:fld>
+            <a:endParaRPr lang="en-US"/>
+          </a:p>
+        </p:txBody>
+      </p:sp>
     </p:spTree>
   </p:cSld>
   <p:clrMapOvr>
@@ -1481,6 +1529,54 @@
           <a:chExt cx="0" cy="0"/>
         </a:xfrm>
       </p:grpSpPr>
+      <p:sp>
+        <p:nvSpPr>
+          <p:cNvPr id="25" name="Slide Number Placeholder 0"/>
+          <p:cNvSpPr>
+            <a:spLocks noGrp="1"/>
+          </p:cNvSpPr>
+          <p:nvPr>
+            <p:ph type="sldNum" sz="quarter" idx="4294967295"/>
+          </p:nvPr>
+        </p:nvSpPr>
+        <p:spPr>
+          <a:xfrm>
+            <a:off x="5821528" y="6473952"/>
+            <a:ext cx="548640" cy="274320"/>
+          </a:xfrm>
+          <a:prstGeom prst="rect">
+            <a:avLst/>
+          </a:prstGeom>
+          <a:extLst>
+            <a:ext uri="{C572A759-6A51-4108-AA02-DFA0A04FC94B}">
+              <ma14:wrappingTextBoxFlag xmlns:ma14="http://schemas.microsoft.com/office/mac/drawingml/2011/main" val="0"/>
+            </a:ext>
+          </a:extLst>
+        </p:spPr>
+        <p:txBody>
+          <a:bodyPr anchor="ctr"/>
+          <a:lstStyle>
+            <a:lvl1pPr>
+              <a:defRPr sz="1000">
+                <a:solidFill>
+                  <a:srgbClr val="8CA3C7"/>
+                </a:solidFill>
+                <a:latin typeface="Calibri"/>
+                <a:ea typeface="Calibri"/>
+                <a:cs typeface="Calibri"/>
+              </a:defRPr>
+            </a:lvl1pPr>
+          </a:lstStyle>
+          <a:p>
+            <a:pPr algn="ctr"/>
+            <a:fld id="{F7021451-1387-4CA6-816F-3879F97B5CBC}" type="slidenum">
+              <a:rPr b="0" lang="en-US"/>
+              <a:t>null</a:t>
+            </a:fld>
+            <a:endParaRPr lang="en-US"/>
+          </a:p>
+        </p:txBody>
+      </p:sp>
     </p:spTree>
   </p:cSld>
   <p:clrMap bg1="lt1" tx1="dk1" bg2="lt2" tx2="dk2" accent1="accent1" accent2="accent2" accent3="accent3" accent4="accent4" accent5="accent5" accent6="accent6" hlink="hlink" folHlink="folHlink"/>
@@ -1983,6 +2079,54 @@
               <a:t>Turn a what-and-why spec into a reviewable how, before any code changes.</a:t>
             </a:r>
             <a:endParaRPr lang="en-US" sz="1800" dirty="0"/>
+          </a:p>
+        </p:txBody>
+      </p:sp>
+      <p:sp>
+        <p:nvSpPr>
+          <p:cNvPr id="25" name="Slide Number Placeholder 0"/>
+          <p:cNvSpPr>
+            <a:spLocks noGrp="1"/>
+          </p:cNvSpPr>
+          <p:nvPr>
+            <p:ph type="sldNum" sz="quarter" idx="4294967295"/>
+          </p:nvPr>
+        </p:nvSpPr>
+        <p:spPr>
+          <a:xfrm>
+            <a:off x="5821528" y="6473952"/>
+            <a:ext cx="548640" cy="274320"/>
+          </a:xfrm>
+          <a:prstGeom prst="rect">
+            <a:avLst/>
+          </a:prstGeom>
+          <a:extLst>
+            <a:ext uri="{C572A759-6A51-4108-AA02-DFA0A04FC94B}">
+              <ma14:wrappingTextBoxFlag xmlns:ma14="http://schemas.microsoft.com/office/mac/drawingml/2011/main" val="0"/>
+            </a:ext>
+          </a:extLst>
+        </p:spPr>
+        <p:txBody>
+          <a:bodyPr anchor="ctr"/>
+          <a:lstStyle>
+            <a:lvl1pPr>
+              <a:defRPr sz="1000">
+                <a:solidFill>
+                  <a:srgbClr val="8CA3C7"/>
+                </a:solidFill>
+                <a:latin typeface="Calibri"/>
+                <a:ea typeface="Calibri"/>
+                <a:cs typeface="Calibri"/>
+              </a:defRPr>
+            </a:lvl1pPr>
+          </a:lstStyle>
+          <a:p>
+            <a:pPr algn="ctr"/>
+            <a:fld id="{F7021451-1387-4CA6-816F-3879F97B5CBC}" type="slidenum">
+              <a:rPr b="0" lang="en-US"/>
+              <a:t>1</a:t>
+            </a:fld>
+            <a:endParaRPr lang="en-US"/>
           </a:p>
         </p:txBody>
       </p:sp>
@@ -2961,6 +3105,54 @@
           </a:p>
         </p:txBody>
       </p:sp>
+      <p:sp>
+        <p:nvSpPr>
+          <p:cNvPr id="25" name="Slide Number Placeholder 0"/>
+          <p:cNvSpPr>
+            <a:spLocks noGrp="1"/>
+          </p:cNvSpPr>
+          <p:nvPr>
+            <p:ph type="sldNum" sz="quarter" idx="4294967295"/>
+          </p:nvPr>
+        </p:nvSpPr>
+        <p:spPr>
+          <a:xfrm>
+            <a:off x="5821528" y="6473952"/>
+            <a:ext cx="548640" cy="274320"/>
+          </a:xfrm>
+          <a:prstGeom prst="rect">
+            <a:avLst/>
+          </a:prstGeom>
+          <a:extLst>
+            <a:ext uri="{C572A759-6A51-4108-AA02-DFA0A04FC94B}">
+              <ma14:wrappingTextBoxFlag xmlns:ma14="http://schemas.microsoft.com/office/mac/drawingml/2011/main" val="0"/>
+            </a:ext>
+          </a:extLst>
+        </p:spPr>
+        <p:txBody>
+          <a:bodyPr anchor="ctr"/>
+          <a:lstStyle>
+            <a:lvl1pPr>
+              <a:defRPr sz="1000">
+                <a:solidFill>
+                  <a:srgbClr val="5A6B85"/>
+                </a:solidFill>
+                <a:latin typeface="Calibri"/>
+                <a:ea typeface="Calibri"/>
+                <a:cs typeface="Calibri"/>
+              </a:defRPr>
+            </a:lvl1pPr>
+          </a:lstStyle>
+          <a:p>
+            <a:pPr algn="ctr"/>
+            <a:fld id="{F7021451-1387-4CA6-816F-3879F97B5CBC}" type="slidenum">
+              <a:rPr b="0" lang="en-US"/>
+              <a:t>10</a:t>
+            </a:fld>
+            <a:endParaRPr lang="en-US"/>
+          </a:p>
+        </p:txBody>
+      </p:sp>
     </p:spTree>
   </p:cSld>
   <p:clrMapOvr>
@@ -3287,6 +3479,54 @@
           </a:p>
         </p:txBody>
       </p:sp>
+      <p:sp>
+        <p:nvSpPr>
+          <p:cNvPr id="25" name="Slide Number Placeholder 0"/>
+          <p:cNvSpPr>
+            <a:spLocks noGrp="1"/>
+          </p:cNvSpPr>
+          <p:nvPr>
+            <p:ph type="sldNum" sz="quarter" idx="4294967295"/>
+          </p:nvPr>
+        </p:nvSpPr>
+        <p:spPr>
+          <a:xfrm>
+            <a:off x="5821528" y="6473952"/>
+            <a:ext cx="548640" cy="274320"/>
+          </a:xfrm>
+          <a:prstGeom prst="rect">
+            <a:avLst/>
+          </a:prstGeom>
+          <a:extLst>
+            <a:ext uri="{C572A759-6A51-4108-AA02-DFA0A04FC94B}">
+              <ma14:wrappingTextBoxFlag xmlns:ma14="http://schemas.microsoft.com/office/mac/drawingml/2011/main" val="0"/>
+            </a:ext>
+          </a:extLst>
+        </p:spPr>
+        <p:txBody>
+          <a:bodyPr anchor="ctr"/>
+          <a:lstStyle>
+            <a:lvl1pPr>
+              <a:defRPr sz="1000">
+                <a:solidFill>
+                  <a:srgbClr val="8CA3C7"/>
+                </a:solidFill>
+                <a:latin typeface="Calibri"/>
+                <a:ea typeface="Calibri"/>
+                <a:cs typeface="Calibri"/>
+              </a:defRPr>
+            </a:lvl1pPr>
+          </a:lstStyle>
+          <a:p>
+            <a:pPr algn="ctr"/>
+            <a:fld id="{F7021451-1387-4CA6-816F-3879F97B5CBC}" type="slidenum">
+              <a:rPr b="0" lang="en-US"/>
+              <a:t>11</a:t>
+            </a:fld>
+            <a:endParaRPr lang="en-US"/>
+          </a:p>
+        </p:txBody>
+      </p:sp>
     </p:spTree>
   </p:cSld>
   <p:clrMapOvr>
@@ -3730,6 +3970,54 @@
           </a:p>
         </p:txBody>
       </p:sp>
+      <p:sp>
+        <p:nvSpPr>
+          <p:cNvPr id="25" name="Slide Number Placeholder 0"/>
+          <p:cNvSpPr>
+            <a:spLocks noGrp="1"/>
+          </p:cNvSpPr>
+          <p:nvPr>
+            <p:ph type="sldNum" sz="quarter" idx="4294967295"/>
+          </p:nvPr>
+        </p:nvSpPr>
+        <p:spPr>
+          <a:xfrm>
+            <a:off x="5821528" y="6473952"/>
+            <a:ext cx="548640" cy="274320"/>
+          </a:xfrm>
+          <a:prstGeom prst="rect">
+            <a:avLst/>
+          </a:prstGeom>
+          <a:extLst>
+            <a:ext uri="{C572A759-6A51-4108-AA02-DFA0A04FC94B}">
+              <ma14:wrappingTextBoxFlag xmlns:ma14="http://schemas.microsoft.com/office/mac/drawingml/2011/main" val="0"/>
+            </a:ext>
+          </a:extLst>
+        </p:spPr>
+        <p:txBody>
+          <a:bodyPr anchor="ctr"/>
+          <a:lstStyle>
+            <a:lvl1pPr>
+              <a:defRPr sz="1000">
+                <a:solidFill>
+                  <a:srgbClr val="5A6B85"/>
+                </a:solidFill>
+                <a:latin typeface="Calibri"/>
+                <a:ea typeface="Calibri"/>
+                <a:cs typeface="Calibri"/>
+              </a:defRPr>
+            </a:lvl1pPr>
+          </a:lstStyle>
+          <a:p>
+            <a:pPr algn="ctr"/>
+            <a:fld id="{F7021451-1387-4CA6-816F-3879F97B5CBC}" type="slidenum">
+              <a:rPr b="0" lang="en-US"/>
+              <a:t>2</a:t>
+            </a:fld>
+            <a:endParaRPr lang="en-US"/>
+          </a:p>
+        </p:txBody>
+      </p:sp>
     </p:spTree>
   </p:cSld>
   <p:clrMapOvr>
@@ -4080,6 +4368,54 @@
           </a:p>
         </p:txBody>
       </p:sp>
+      <p:sp>
+        <p:nvSpPr>
+          <p:cNvPr id="25" name="Slide Number Placeholder 0"/>
+          <p:cNvSpPr>
+            <a:spLocks noGrp="1"/>
+          </p:cNvSpPr>
+          <p:nvPr>
+            <p:ph type="sldNum" sz="quarter" idx="4294967295"/>
+          </p:nvPr>
+        </p:nvSpPr>
+        <p:spPr>
+          <a:xfrm>
+            <a:off x="5821528" y="6473952"/>
+            <a:ext cx="548640" cy="274320"/>
+          </a:xfrm>
+          <a:prstGeom prst="rect">
+            <a:avLst/>
+          </a:prstGeom>
+          <a:extLst>
+            <a:ext uri="{C572A759-6A51-4108-AA02-DFA0A04FC94B}">
+              <ma14:wrappingTextBoxFlag xmlns:ma14="http://schemas.microsoft.com/office/mac/drawingml/2011/main" val="0"/>
+            </a:ext>
+          </a:extLst>
+        </p:spPr>
+        <p:txBody>
+          <a:bodyPr anchor="ctr"/>
+          <a:lstStyle>
+            <a:lvl1pPr>
+              <a:defRPr sz="1000">
+                <a:solidFill>
+                  <a:srgbClr val="5A6B85"/>
+                </a:solidFill>
+                <a:latin typeface="Calibri"/>
+                <a:ea typeface="Calibri"/>
+                <a:cs typeface="Calibri"/>
+              </a:defRPr>
+            </a:lvl1pPr>
+          </a:lstStyle>
+          <a:p>
+            <a:pPr algn="ctr"/>
+            <a:fld id="{F7021451-1387-4CA6-816F-3879F97B5CBC}" type="slidenum">
+              <a:rPr b="0" lang="en-US"/>
+              <a:t>3</a:t>
+            </a:fld>
+            <a:endParaRPr lang="en-US"/>
+          </a:p>
+        </p:txBody>
+      </p:sp>
     </p:spTree>
   </p:cSld>
   <p:clrMapOvr>
@@ -4511,6 +4847,54 @@
           </a:p>
         </p:txBody>
       </p:sp>
+      <p:sp>
+        <p:nvSpPr>
+          <p:cNvPr id="25" name="Slide Number Placeholder 0"/>
+          <p:cNvSpPr>
+            <a:spLocks noGrp="1"/>
+          </p:cNvSpPr>
+          <p:nvPr>
+            <p:ph type="sldNum" sz="quarter" idx="4294967295"/>
+          </p:nvPr>
+        </p:nvSpPr>
+        <p:spPr>
+          <a:xfrm>
+            <a:off x="5821528" y="6473952"/>
+            <a:ext cx="548640" cy="274320"/>
+          </a:xfrm>
+          <a:prstGeom prst="rect">
+            <a:avLst/>
+          </a:prstGeom>
+          <a:extLst>
+            <a:ext uri="{C572A759-6A51-4108-AA02-DFA0A04FC94B}">
+              <ma14:wrappingTextBoxFlag xmlns:ma14="http://schemas.microsoft.com/office/mac/drawingml/2011/main" val="0"/>
+            </a:ext>
+          </a:extLst>
+        </p:spPr>
+        <p:txBody>
+          <a:bodyPr anchor="ctr"/>
+          <a:lstStyle>
+            <a:lvl1pPr>
+              <a:defRPr sz="1000">
+                <a:solidFill>
+                  <a:srgbClr val="5A6B85"/>
+                </a:solidFill>
+                <a:latin typeface="Calibri"/>
+                <a:ea typeface="Calibri"/>
+                <a:cs typeface="Calibri"/>
+              </a:defRPr>
+            </a:lvl1pPr>
+          </a:lstStyle>
+          <a:p>
+            <a:pPr algn="ctr"/>
+            <a:fld id="{F7021451-1387-4CA6-816F-3879F97B5CBC}" type="slidenum">
+              <a:rPr b="0" lang="en-US"/>
+              <a:t>4</a:t>
+            </a:fld>
+            <a:endParaRPr lang="en-US"/>
+          </a:p>
+        </p:txBody>
+      </p:sp>
     </p:spTree>
   </p:cSld>
   <p:clrMapOvr>
@@ -4821,6 +5205,54 @@
           </a:p>
         </p:txBody>
       </p:sp>
+      <p:sp>
+        <p:nvSpPr>
+          <p:cNvPr id="25" name="Slide Number Placeholder 0"/>
+          <p:cNvSpPr>
+            <a:spLocks noGrp="1"/>
+          </p:cNvSpPr>
+          <p:nvPr>
+            <p:ph type="sldNum" sz="quarter" idx="4294967295"/>
+          </p:nvPr>
+        </p:nvSpPr>
+        <p:spPr>
+          <a:xfrm>
+            <a:off x="5821528" y="6473952"/>
+            <a:ext cx="548640" cy="274320"/>
+          </a:xfrm>
+          <a:prstGeom prst="rect">
+            <a:avLst/>
+          </a:prstGeom>
+          <a:extLst>
+            <a:ext uri="{C572A759-6A51-4108-AA02-DFA0A04FC94B}">
+              <ma14:wrappingTextBoxFlag xmlns:ma14="http://schemas.microsoft.com/office/mac/drawingml/2011/main" val="0"/>
+            </a:ext>
+          </a:extLst>
+        </p:spPr>
+        <p:txBody>
+          <a:bodyPr anchor="ctr"/>
+          <a:lstStyle>
+            <a:lvl1pPr>
+              <a:defRPr sz="1000">
+                <a:solidFill>
+                  <a:srgbClr val="8CA3C7"/>
+                </a:solidFill>
+                <a:latin typeface="Calibri"/>
+                <a:ea typeface="Calibri"/>
+                <a:cs typeface="Calibri"/>
+              </a:defRPr>
+            </a:lvl1pPr>
+          </a:lstStyle>
+          <a:p>
+            <a:pPr algn="ctr"/>
+            <a:fld id="{F7021451-1387-4CA6-816F-3879F97B5CBC}" type="slidenum">
+              <a:rPr b="0" lang="en-US"/>
+              <a:t>5</a:t>
+            </a:fld>
+            <a:endParaRPr lang="en-US"/>
+          </a:p>
+        </p:txBody>
+      </p:sp>
     </p:spTree>
   </p:cSld>
   <p:clrMapOvr>
@@ -4886,7 +5318,7 @@
                 <a:ea typeface="Calibri" pitchFamily="34" charset="-122"/>
                 <a:cs typeface="Calibri" pitchFamily="34" charset="-120"/>
               </a:rPr>
-              <a:t>APPLYING THIS WITH</a:t>
+              <a:t>APPLYING THE CONCEPTS</a:t>
             </a:r>
             <a:endParaRPr lang="en-US" sz="1400" dirty="0"/>
           </a:p>
@@ -5006,6 +5438,54 @@
               <a:t>Spec-Driven Development with Agentic AI</a:t>
             </a:r>
             <a:endParaRPr lang="en-US" sz="1000" dirty="0"/>
+          </a:p>
+        </p:txBody>
+      </p:sp>
+      <p:sp>
+        <p:nvSpPr>
+          <p:cNvPr id="25" name="Slide Number Placeholder 0"/>
+          <p:cNvSpPr>
+            <a:spLocks noGrp="1"/>
+          </p:cNvSpPr>
+          <p:nvPr>
+            <p:ph type="sldNum" sz="quarter" idx="4294967295"/>
+          </p:nvPr>
+        </p:nvSpPr>
+        <p:spPr>
+          <a:xfrm>
+            <a:off x="5821528" y="6473952"/>
+            <a:ext cx="548640" cy="274320"/>
+          </a:xfrm>
+          <a:prstGeom prst="rect">
+            <a:avLst/>
+          </a:prstGeom>
+          <a:extLst>
+            <a:ext uri="{C572A759-6A51-4108-AA02-DFA0A04FC94B}">
+              <ma14:wrappingTextBoxFlag xmlns:ma14="http://schemas.microsoft.com/office/mac/drawingml/2011/main" val="0"/>
+            </a:ext>
+          </a:extLst>
+        </p:spPr>
+        <p:txBody>
+          <a:bodyPr anchor="ctr"/>
+          <a:lstStyle>
+            <a:lvl1pPr>
+              <a:defRPr sz="1000">
+                <a:solidFill>
+                  <a:srgbClr val="8CA3C7"/>
+                </a:solidFill>
+                <a:latin typeface="Calibri"/>
+                <a:ea typeface="Calibri"/>
+                <a:cs typeface="Calibri"/>
+              </a:defRPr>
+            </a:lvl1pPr>
+          </a:lstStyle>
+          <a:p>
+            <a:pPr algn="ctr"/>
+            <a:fld id="{F7021451-1387-4CA6-816F-3879F97B5CBC}" type="slidenum">
+              <a:rPr b="0" lang="en-US"/>
+              <a:t>6</a:t>
+            </a:fld>
+            <a:endParaRPr lang="en-US"/>
           </a:p>
         </p:txBody>
       </p:sp>
@@ -5463,6 +5943,54 @@
           </a:p>
         </p:txBody>
       </p:sp>
+      <p:sp>
+        <p:nvSpPr>
+          <p:cNvPr id="25" name="Slide Number Placeholder 0"/>
+          <p:cNvSpPr>
+            <a:spLocks noGrp="1"/>
+          </p:cNvSpPr>
+          <p:nvPr>
+            <p:ph type="sldNum" sz="quarter" idx="4294967295"/>
+          </p:nvPr>
+        </p:nvSpPr>
+        <p:spPr>
+          <a:xfrm>
+            <a:off x="5821528" y="6473952"/>
+            <a:ext cx="548640" cy="274320"/>
+          </a:xfrm>
+          <a:prstGeom prst="rect">
+            <a:avLst/>
+          </a:prstGeom>
+          <a:extLst>
+            <a:ext uri="{C572A759-6A51-4108-AA02-DFA0A04FC94B}">
+              <ma14:wrappingTextBoxFlag xmlns:ma14="http://schemas.microsoft.com/office/mac/drawingml/2011/main" val="0"/>
+            </a:ext>
+          </a:extLst>
+        </p:spPr>
+        <p:txBody>
+          <a:bodyPr anchor="ctr"/>
+          <a:lstStyle>
+            <a:lvl1pPr>
+              <a:defRPr sz="1000">
+                <a:solidFill>
+                  <a:srgbClr val="5A6B85"/>
+                </a:solidFill>
+                <a:latin typeface="Calibri"/>
+                <a:ea typeface="Calibri"/>
+                <a:cs typeface="Calibri"/>
+              </a:defRPr>
+            </a:lvl1pPr>
+          </a:lstStyle>
+          <a:p>
+            <a:pPr algn="ctr"/>
+            <a:fld id="{F7021451-1387-4CA6-816F-3879F97B5CBC}" type="slidenum">
+              <a:rPr b="0" lang="en-US"/>
+              <a:t>7</a:t>
+            </a:fld>
+            <a:endParaRPr lang="en-US"/>
+          </a:p>
+        </p:txBody>
+      </p:sp>
     </p:spTree>
   </p:cSld>
   <p:clrMapOvr>
@@ -5528,7 +6056,7 @@
                 <a:ea typeface="Calibri" pitchFamily="34" charset="-122"/>
                 <a:cs typeface="Calibri" pitchFamily="34" charset="-120"/>
               </a:rPr>
-              <a:t>APPLYING THIS WITH</a:t>
+              <a:t>APPLYING THE CONCEPTS</a:t>
             </a:r>
             <a:endParaRPr lang="en-US" sz="1400" dirty="0"/>
           </a:p>
@@ -5648,6 +6176,54 @@
               <a:t>Spec-Driven Development with Agentic AI</a:t>
             </a:r>
             <a:endParaRPr lang="en-US" sz="1000" dirty="0"/>
+          </a:p>
+        </p:txBody>
+      </p:sp>
+      <p:sp>
+        <p:nvSpPr>
+          <p:cNvPr id="25" name="Slide Number Placeholder 0"/>
+          <p:cNvSpPr>
+            <a:spLocks noGrp="1"/>
+          </p:cNvSpPr>
+          <p:nvPr>
+            <p:ph type="sldNum" sz="quarter" idx="4294967295"/>
+          </p:nvPr>
+        </p:nvSpPr>
+        <p:spPr>
+          <a:xfrm>
+            <a:off x="5821528" y="6473952"/>
+            <a:ext cx="548640" cy="274320"/>
+          </a:xfrm>
+          <a:prstGeom prst="rect">
+            <a:avLst/>
+          </a:prstGeom>
+          <a:extLst>
+            <a:ext uri="{C572A759-6A51-4108-AA02-DFA0A04FC94B}">
+              <ma14:wrappingTextBoxFlag xmlns:ma14="http://schemas.microsoft.com/office/mac/drawingml/2011/main" val="0"/>
+            </a:ext>
+          </a:extLst>
+        </p:spPr>
+        <p:txBody>
+          <a:bodyPr anchor="ctr"/>
+          <a:lstStyle>
+            <a:lvl1pPr>
+              <a:defRPr sz="1000">
+                <a:solidFill>
+                  <a:srgbClr val="8CA3C7"/>
+                </a:solidFill>
+                <a:latin typeface="Calibri"/>
+                <a:ea typeface="Calibri"/>
+                <a:cs typeface="Calibri"/>
+              </a:defRPr>
+            </a:lvl1pPr>
+          </a:lstStyle>
+          <a:p>
+            <a:pPr algn="ctr"/>
+            <a:fld id="{F7021451-1387-4CA6-816F-3879F97B5CBC}" type="slidenum">
+              <a:rPr b="0" lang="en-US"/>
+              <a:t>8</a:t>
+            </a:fld>
+            <a:endParaRPr lang="en-US"/>
           </a:p>
         </p:txBody>
       </p:sp>
@@ -6130,6 +6706,54 @@
               <a:t>Spec-Driven Development with Agentic AI</a:t>
             </a:r>
             <a:endParaRPr lang="en-US" sz="1000" dirty="0"/>
+          </a:p>
+        </p:txBody>
+      </p:sp>
+      <p:sp>
+        <p:nvSpPr>
+          <p:cNvPr id="25" name="Slide Number Placeholder 0"/>
+          <p:cNvSpPr>
+            <a:spLocks noGrp="1"/>
+          </p:cNvSpPr>
+          <p:nvPr>
+            <p:ph type="sldNum" sz="quarter" idx="4294967295"/>
+          </p:nvPr>
+        </p:nvSpPr>
+        <p:spPr>
+          <a:xfrm>
+            <a:off x="5821528" y="6473952"/>
+            <a:ext cx="548640" cy="274320"/>
+          </a:xfrm>
+          <a:prstGeom prst="rect">
+            <a:avLst/>
+          </a:prstGeom>
+          <a:extLst>
+            <a:ext uri="{C572A759-6A51-4108-AA02-DFA0A04FC94B}">
+              <ma14:wrappingTextBoxFlag xmlns:ma14="http://schemas.microsoft.com/office/mac/drawingml/2011/main" val="0"/>
+            </a:ext>
+          </a:extLst>
+        </p:spPr>
+        <p:txBody>
+          <a:bodyPr anchor="ctr"/>
+          <a:lstStyle>
+            <a:lvl1pPr>
+              <a:defRPr sz="1000">
+                <a:solidFill>
+                  <a:srgbClr val="5A6B85"/>
+                </a:solidFill>
+                <a:latin typeface="Calibri"/>
+                <a:ea typeface="Calibri"/>
+                <a:cs typeface="Calibri"/>
+              </a:defRPr>
+            </a:lvl1pPr>
+          </a:lstStyle>
+          <a:p>
+            <a:pPr algn="ctr"/>
+            <a:fld id="{F7021451-1387-4CA6-816F-3879F97B5CBC}" type="slidenum">
+              <a:rPr b="0" lang="en-US"/>
+              <a:t>9</a:t>
+            </a:fld>
+            <a:endParaRPr lang="en-US"/>
           </a:p>
         </p:txBody>
       </p:sp>

--- a/presentation/Module-4_From-Clarified-Spec-to-Reviewable-Plan.pptx
+++ b/presentation/Module-4_From-Clarified-Spec-to-Reviewable-Plan.pptx
@@ -3277,7 +3277,7 @@
                 <a:ea typeface="Calibri" pitchFamily="34" charset="-122"/>
                 <a:cs typeface="Calibri" pitchFamily="34" charset="-120"/>
               </a:rPr>
-              <a:t>A plan you haven't reviewed is a plan you're implicitly approving.</a:t>
+              <a:t>A plan you haven't reviewed is a plan you're implicitly approving, whether or not that was your intent.</a:t>
             </a:r>
             <a:endParaRPr lang="en-US" sz="1700" dirty="0"/>
           </a:p>
@@ -3336,7 +3336,7 @@
                 <a:ea typeface="Calibri" pitchFamily="34" charset="-122"/>
                 <a:cs typeface="Calibri" pitchFamily="34" charset="-120"/>
               </a:rPr>
-              <a:t>Small tasks are easier to verify and easier to isolate when something breaks.</a:t>
+              <a:t>Small tasks are easier to verify and easier to isolate when something breaks, which shortens the distance from failure to fix.</a:t>
             </a:r>
             <a:endParaRPr lang="en-US" sz="1700" dirty="0"/>
           </a:p>
@@ -3395,7 +3395,7 @@
                 <a:ea typeface="Calibri" pitchFamily="34" charset="-122"/>
                 <a:cs typeface="Calibri" pitchFamily="34" charset="-120"/>
               </a:rPr>
-              <a:t>Both frameworks support staged review: Spec Kit through separate commands, OpenSpec through /opsx:continue.</a:t>
+              <a:t>Both frameworks support staged review: Spec Kit through separate commands, OpenSpec through /opsx:continue, so a cautious team isn't locked out of either tool.</a:t>
             </a:r>
             <a:endParaRPr lang="en-US" sz="1700" dirty="0"/>
           </a:p>
@@ -4203,7 +4203,7 @@
                 <a:ea typeface="Calibri" pitchFamily="34" charset="-122"/>
                 <a:cs typeface="Calibri" pitchFamily="34" charset="-120"/>
               </a:rPr>
-              <a:t>The plan is where architecture choices, constraints, and non-functional requirements belong.</a:t>
+              <a:t>The plan is where architecture choices, constraints, and non-functional requirements belong, keeping that detail out of the spec so the spec stays readable and stable.</a:t>
             </a:r>
             <a:endParaRPr lang="en-US" sz="1500" dirty="0"/>
           </a:p>
@@ -4284,7 +4284,7 @@
                 <a:ea typeface="Calibri" pitchFamily="34" charset="-122"/>
                 <a:cs typeface="Calibri" pitchFamily="34" charset="-120"/>
               </a:rPr>
-              <a:t>It's the bridge between what and why (the spec) and how (the code).</a:t>
+              <a:t>It's the bridge between what and why (the spec) and how (the code), which is why reviewing the plan carefully matters just as much as reviewing the spec did.</a:t>
             </a:r>
             <a:endParaRPr lang="en-US" sz="1500" dirty="0"/>
           </a:p>
@@ -4601,7 +4601,7 @@
                 <a:ea typeface="Calibri" pitchFamily="34" charset="-122"/>
                 <a:cs typeface="Calibri" pitchFamily="34" charset="-120"/>
               </a:rPr>
-              <a:t>A reviewable plan is produced before any file changes are made: a deliberate checkpoint.</a:t>
+              <a:t>A reviewable plan is produced before any file changes are made: a deliberate checkpoint that exists specifically so mistakes get caught on paper, not in a diff.</a:t>
             </a:r>
             <a:endParaRPr lang="en-US" sz="1500" dirty="0"/>
           </a:p>
@@ -4682,7 +4682,7 @@
                 <a:ea typeface="Calibri" pitchFamily="34" charset="-122"/>
                 <a:cs typeface="Calibri" pitchFamily="34" charset="-120"/>
               </a:rPr>
-              <a:t>The team reviews and edits the plan, including disagreeing with an architecture or scope decision, before an agent touches code.</a:t>
+              <a:t>The team reviews and edits the plan, including disagreeing with an architecture or scope decision, before an agent touches code, so disagreements are resolved while they're still cheap to resolve.</a:t>
             </a:r>
             <a:endParaRPr lang="en-US" sz="1500" dirty="0"/>
           </a:p>
@@ -4763,7 +4763,7 @@
                 <a:ea typeface="Calibri" pitchFamily="34" charset="-122"/>
                 <a:cs typeface="Calibri" pitchFamily="34" charset="-120"/>
               </a:rPr>
-              <a:t>Break the approved plan into small, independently verifiable, agent-executable tasks. Each task should map back to a specific requirement.</a:t>
+              <a:t>Break the approved plan into small, independently verifiable, agent-executable tasks. Each task should map back to a specific requirement, so it's obvious which requirement a failing task actually threatens.</a:t>
             </a:r>
             <a:endParaRPr lang="en-US" sz="1500" dirty="0"/>
           </a:p>
@@ -5060,7 +5060,7 @@
                 <a:ea typeface="Calibri" pitchFamily="34" charset="-122"/>
                 <a:cs typeface="Calibri" pitchFamily="34" charset="-120"/>
               </a:rPr>
-              <a:t>Every architecture and scope choice in the plan becomes real the moment implement runs.</a:t>
+              <a:t>Every architecture and scope choice in the plan becomes real the moment implement runs, so silence during plan review isn't neutral, it's implicit approval of everything in the plan.</a:t>
             </a:r>
             <a:endParaRPr lang="en-US" sz="1500" dirty="0"/>
           </a:p>
@@ -5121,7 +5121,7 @@
                 <a:ea typeface="Calibri" pitchFamily="34" charset="-122"/>
                 <a:cs typeface="Calibri" pitchFamily="34" charset="-120"/>
               </a:rPr>
-              <a:t>Catching a disagreement here costs a conversation. Catching it after implementation costs a rewrite.</a:t>
+              <a:t>Catching a disagreement here costs a conversation. Catching it after implementation costs a rewrite, which is the entire reason this checkpoint exists before any code is touched.</a:t>
             </a:r>
             <a:endParaRPr lang="en-US" sz="1500" dirty="0"/>
           </a:p>
@@ -5737,7 +5737,7 @@
                 <a:ea typeface="Calibri" pitchFamily="34" charset="-122"/>
                 <a:cs typeface="Calibri" pitchFamily="34" charset="-120"/>
               </a:rPr>
-              <a:t>Generates design artifacts from the spec, given tech stack, architecture, and constraints as arguments.</a:t>
+              <a:t>Generates design artifacts from the spec, given tech stack, architecture, and constraints as arguments, so the same spec can produce different plans depending on the stack a team actually uses.</a:t>
             </a:r>
             <a:endParaRPr lang="en-US" sz="1350" dirty="0"/>
           </a:p>
@@ -5859,7 +5859,7 @@
                 <a:ea typeface="Calibri" pitchFamily="34" charset="-122"/>
                 <a:cs typeface="Calibri" pitchFamily="34" charset="-120"/>
               </a:rPr>
-              <a:t>Generates a dependency-ordered tasks.md: Setup, Foundational, one phase per user story, and a final Polish phase. Tasks are marked for parallel execution where possible.</a:t>
+              <a:t>Generates a dependency-ordered tasks.md: Setup, Foundational, one phase per user story, and a final Polish phase. Tasks are marked for parallel execution where possible, so independent work doesn't have to wait in a single queue.</a:t>
             </a:r>
             <a:endParaRPr lang="en-US" sz="1350" dirty="0"/>
           </a:p>
@@ -6428,7 +6428,7 @@
                 <a:ea typeface="Calibri" pitchFamily="34" charset="-122"/>
                 <a:cs typeface="Calibri" pitchFamily="34" charset="-120"/>
               </a:rPr>
-              <a:t>design.md is the plan equivalent, "the how: technical approach and architecture decisions," generated alongside the proposal.</a:t>
+              <a:t>design.md is the plan equivalent, "the how: technical approach and architecture decisions," generated alongside the proposal, so the plan and the proposal are written and reviewed as one connected pair.</a:t>
             </a:r>
             <a:endParaRPr lang="en-US" sz="1400" dirty="0"/>
           </a:p>
@@ -6503,7 +6503,7 @@
                 <a:ea typeface="Calibri" pitchFamily="34" charset="-122"/>
                 <a:cs typeface="Calibri" pitchFamily="34" charset="-120"/>
               </a:rPr>
-              <a:t>tasks.md, an implementation checklist with checkboxes, is generated in the same step by default.</a:t>
+              <a:t>tasks.md, an implementation checklist with checkboxes, is generated in the same step by default, which keeps the plan and its breakdown from drifting apart the way a separately-written task list sometimes does.</a:t>
             </a:r>
             <a:endParaRPr lang="en-US" sz="1400" dirty="0"/>
           </a:p>
@@ -6625,7 +6625,7 @@
                 <a:ea typeface="Calibri" pitchFamily="34" charset="-122"/>
                 <a:cs typeface="Calibri" pitchFamily="34" charset="-120"/>
               </a:rPr>
-              <a:t>Creates one artifact at a time for teams that want to review each before the next is generated, instead of the default all-at-once /opsx:propose or /opsx:ff.</a:t>
+              <a:t>Creates one artifact at a time for teams that want to review each before the next is generated, instead of the default all-at-once /opsx:propose or /opsx:ff, giving cautious teams the same staged checkpoints Spec Kit gets from separate commands.</a:t>
             </a:r>
             <a:endParaRPr lang="en-US" sz="1350" dirty="0"/>
           </a:p>
